--- a/branded_docs/VBX_SQ-OS_Internal.pptx
+++ b/branded_docs/VBX_SQ-OS_Internal.pptx
@@ -3180,7 +3180,7 @@
         </p:nvSpPr>
         <p:spPr>
           <a:xfrm>
-            <a:off x="640080" y="5870448"/>
+            <a:off x="640080" y="5925312"/>
             <a:ext cx="10911535" cy="365760"/>
           </a:xfrm>
           <a:prstGeom prst="rect">
@@ -5905,7 +5905,7 @@
         </p:nvSpPr>
         <p:spPr>
           <a:xfrm>
-            <a:off x="9052560" y="5961888"/>
+            <a:off x="9052560" y="6053328"/>
             <a:ext cx="2499055" cy="274320"/>
           </a:xfrm>
           <a:prstGeom prst="rect">
@@ -6677,7 +6677,7 @@
         </p:nvSpPr>
         <p:spPr>
           <a:xfrm>
-            <a:off x="1920240" y="5961888"/>
+            <a:off x="1920240" y="6007608"/>
             <a:ext cx="8229600" cy="274320"/>
           </a:xfrm>
           <a:prstGeom prst="rect">
@@ -7563,7 +7563,7 @@
         </p:nvSpPr>
         <p:spPr>
           <a:xfrm>
-            <a:off x="640080" y="5779008"/>
+            <a:off x="640080" y="5833872"/>
             <a:ext cx="10911535" cy="457200"/>
           </a:xfrm>
           <a:prstGeom prst="rect">
@@ -9097,7 +9097,7 @@
         </p:nvSpPr>
         <p:spPr>
           <a:xfrm>
-            <a:off x="640080" y="5870448"/>
+            <a:off x="640080" y="5925312"/>
             <a:ext cx="10911535" cy="365760"/>
           </a:xfrm>
           <a:prstGeom prst="rect">
